--- a/presentation/jeonse-detective-deck.pptx
+++ b/presentation/jeonse-detective-deck.pptx
@@ -4596,7 +4596,7 @@
         </p:nvGraphicFramePr>
         <p:xfrm>
           <a:off x="502920" y="2148840"/>
-          <a:ext cx="5501486" cy="1371600"/>
+          <a:ext cx="5501485" cy="1371600"/>
         </p:xfrm>
         <a:graphic>
           <a:graphicData uri="http://schemas.openxmlformats.org/drawingml/2006/table">
@@ -4605,7 +4605,7 @@
                 <a:tableStyleId>{5C22544A-7EE6-4342-B048-85BDC9FD1C3A}</a:tableStyleId>
               </a:tblPr>
               <a:tblGrid>
-                <a:gridCol w="2539148"/>
+                <a:gridCol w="2539147"/>
                 <a:gridCol w="2115956"/>
                 <a:gridCol w="846382"/>
               </a:tblGrid>
@@ -4939,8 +4939,8 @@
           <p:nvPr/>
         </p:nvGraphicFramePr>
         <p:xfrm>
-          <a:off x="6187287.5" y="2148840"/>
-          <a:ext cx="5501486" cy="1371600"/>
+          <a:off x="6187287" y="2148840"/>
+          <a:ext cx="5501485" cy="1371600"/>
         </p:xfrm>
         <a:graphic>
           <a:graphicData uri="http://schemas.openxmlformats.org/drawingml/2006/table">
@@ -4949,7 +4949,7 @@
                 <a:tableStyleId>{5C22544A-7EE6-4342-B048-85BDC9FD1C3A}</a:tableStyleId>
               </a:tblPr>
               <a:tblGrid>
-                <a:gridCol w="2539148"/>
+                <a:gridCol w="2539147"/>
                 <a:gridCol w="2115956"/>
                 <a:gridCol w="846382"/>
               </a:tblGrid>
@@ -10000,7 +10000,7 @@
         </p:nvSpPr>
         <p:spPr>
           <a:xfrm>
-            <a:off x="502920" y="3520440"/>
+            <a:off x="502920" y="3474720"/>
             <a:ext cx="11185855" cy="1234440"/>
           </a:xfrm>
           <a:prstGeom prst="roundRect">
@@ -10054,7 +10054,7 @@
         </p:nvSpPr>
         <p:spPr>
           <a:xfrm>
-            <a:off x="667512" y="3685032"/>
+            <a:off x="667512" y="3639312"/>
             <a:ext cx="10856671" cy="292608"/>
           </a:xfrm>
           <a:prstGeom prst="rect">
@@ -10097,7 +10097,7 @@
         </p:nvSpPr>
         <p:spPr>
           <a:xfrm>
-            <a:off x="667512" y="4014216"/>
+            <a:off x="667512" y="3968496"/>
             <a:ext cx="10856671" cy="576072"/>
           </a:xfrm>
           <a:prstGeom prst="rect">
@@ -10140,7 +10140,7 @@
         </p:nvSpPr>
         <p:spPr>
           <a:xfrm>
-            <a:off x="502920" y="4892040"/>
+            <a:off x="502920" y="4800600"/>
             <a:ext cx="11185855" cy="1234440"/>
           </a:xfrm>
           <a:prstGeom prst="roundRect">
@@ -10194,7 +10194,7 @@
         </p:nvSpPr>
         <p:spPr>
           <a:xfrm>
-            <a:off x="667512" y="5056632"/>
+            <a:off x="667512" y="4965192"/>
             <a:ext cx="10856671" cy="292608"/>
           </a:xfrm>
           <a:prstGeom prst="rect">
@@ -10237,7 +10237,7 @@
         </p:nvSpPr>
         <p:spPr>
           <a:xfrm>
-            <a:off x="667512" y="5385816"/>
+            <a:off x="667512" y="5294376"/>
             <a:ext cx="10856671" cy="576072"/>
           </a:xfrm>
           <a:prstGeom prst="rect">
@@ -10280,7 +10280,50 @@
         </p:nvSpPr>
         <p:spPr>
           <a:xfrm>
-            <a:off x="502920" y="6355080"/>
+            <a:off x="502920" y="6172200"/>
+            <a:ext cx="11185855" cy="274320"/>
+          </a:xfrm>
+          <a:prstGeom prst="rect">
+            <a:avLst/>
+          </a:prstGeom>
+          <a:noFill/>
+        </p:spPr>
+        <p:txBody>
+          <a:bodyPr wrap="square" anchor="t" lIns="0" rIns="0" tIns="0" bIns="0">
+            <a:spAutoFit/>
+          </a:bodyPr>
+          <a:lstStyle/>
+          <a:p>
+            <a:pPr algn="l">
+              <a:lnSpc>
+                <a:spcPct val="115000"/>
+              </a:lnSpc>
+              <a:spcAft>
+                <a:spcPts val="0"/>
+              </a:spcAft>
+            </a:pPr>
+            <a:r>
+              <a:rPr sz="1050" b="0" i="0">
+                <a:solidFill>
+                  <a:srgbClr val="8B8272"/>
+                </a:solidFill>
+                <a:latin typeface="Consolas"/>
+                <a:ea typeface="Consolas"/>
+              </a:rPr>
+              <a:t>데이터 — 전세보증대위변제현황_깡통라벨.xlsx          코드 — 전세사기예측_AUC 비교.ipynb          대시보드 — 전세사기예측_대시보드 추가.ipynb</a:t>
+            </a:r>
+          </a:p>
+        </p:txBody>
+      </p:sp>
+      <p:sp>
+        <p:nvSpPr>
+          <p:cNvPr id="16" name="TextBox 15"/>
+          <p:cNvSpPr txBox="1"/>
+          <p:nvPr/>
+        </p:nvSpPr>
+        <p:spPr>
+          <a:xfrm>
+            <a:off x="502920" y="6446520"/>
             <a:ext cx="11185855" cy="320040"/>
           </a:xfrm>
           <a:prstGeom prst="rect">
@@ -13033,7 +13076,7 @@
         </p:nvSpPr>
         <p:spPr>
           <a:xfrm>
-            <a:off x="6164427" y="2148840"/>
+            <a:off x="6164426" y="2148840"/>
             <a:ext cx="2693593" cy="914400"/>
           </a:xfrm>
           <a:prstGeom prst="roundRect">
@@ -13087,7 +13130,7 @@
         </p:nvSpPr>
         <p:spPr>
           <a:xfrm>
-            <a:off x="6301587" y="2286000"/>
+            <a:off x="6301586" y="2286000"/>
             <a:ext cx="2419273" cy="457200"/>
           </a:xfrm>
           <a:prstGeom prst="rect">
@@ -13130,7 +13173,7 @@
         </p:nvSpPr>
         <p:spPr>
           <a:xfrm>
-            <a:off x="6301587" y="2606040"/>
+            <a:off x="6301586" y="2606040"/>
             <a:ext cx="2419273" cy="411480"/>
           </a:xfrm>
           <a:prstGeom prst="rect">
@@ -13173,7 +13216,7 @@
         </p:nvSpPr>
         <p:spPr>
           <a:xfrm>
-            <a:off x="8995181" y="2148840"/>
+            <a:off x="8995179" y="2148840"/>
             <a:ext cx="2693593" cy="914400"/>
           </a:xfrm>
           <a:prstGeom prst="roundRect">
@@ -13227,7 +13270,7 @@
         </p:nvSpPr>
         <p:spPr>
           <a:xfrm>
-            <a:off x="9132341" y="2286000"/>
+            <a:off x="9132339" y="2286000"/>
             <a:ext cx="2419273" cy="457200"/>
           </a:xfrm>
           <a:prstGeom prst="rect">
@@ -13270,7 +13313,7 @@
         </p:nvSpPr>
         <p:spPr>
           <a:xfrm>
-            <a:off x="9132341" y="2606040"/>
+            <a:off x="9132339" y="2606040"/>
             <a:ext cx="2419273" cy="411480"/>
           </a:xfrm>
           <a:prstGeom prst="rect">
@@ -17084,7 +17127,7 @@
         </p:nvSpPr>
         <p:spPr>
           <a:xfrm>
-            <a:off x="6164427" y="2148840"/>
+            <a:off x="6164426" y="2148840"/>
             <a:ext cx="2693593" cy="960120"/>
           </a:xfrm>
           <a:prstGeom prst="roundRect">
@@ -17138,7 +17181,7 @@
         </p:nvSpPr>
         <p:spPr>
           <a:xfrm>
-            <a:off x="6301587" y="2286000"/>
+            <a:off x="6301586" y="2286000"/>
             <a:ext cx="2419273" cy="457200"/>
           </a:xfrm>
           <a:prstGeom prst="rect">
@@ -17181,7 +17224,7 @@
         </p:nvSpPr>
         <p:spPr>
           <a:xfrm>
-            <a:off x="6301587" y="2651760"/>
+            <a:off x="6301586" y="2651760"/>
             <a:ext cx="2419273" cy="411480"/>
           </a:xfrm>
           <a:prstGeom prst="rect">
@@ -17224,7 +17267,7 @@
         </p:nvSpPr>
         <p:spPr>
           <a:xfrm>
-            <a:off x="8995181" y="2148840"/>
+            <a:off x="8995179" y="2148840"/>
             <a:ext cx="2693593" cy="960120"/>
           </a:xfrm>
           <a:prstGeom prst="roundRect">
@@ -17278,7 +17321,7 @@
         </p:nvSpPr>
         <p:spPr>
           <a:xfrm>
-            <a:off x="9132341" y="2286000"/>
+            <a:off x="9132339" y="2286000"/>
             <a:ext cx="2419273" cy="457200"/>
           </a:xfrm>
           <a:prstGeom prst="rect">
@@ -17321,7 +17364,7 @@
         </p:nvSpPr>
         <p:spPr>
           <a:xfrm>
-            <a:off x="9132341" y="2651760"/>
+            <a:off x="9132339" y="2651760"/>
             <a:ext cx="2419273" cy="411480"/>
           </a:xfrm>
           <a:prstGeom prst="rect">
